--- a/(7.30) 아이템 시트 추가.pptx
+++ b/(7.30) 아이템 시트 추가.pptx
@@ -264,7 +264,7 @@
           <a:p>
             <a:fld id="{B1CAF232-DB1F-4E7B-961B-091AE5BB74B4}" type="datetimeFigureOut">
               <a:rPr lang="ko-KR" altLang="en-US" smtClean="0"/>
-              <a:t>2026-07-30</a:t>
+              <a:t>2026-07-31</a:t>
             </a:fld>
             <a:endParaRPr lang="ko-KR" altLang="en-US"/>
           </a:p>
@@ -434,7 +434,7 @@
           <a:p>
             <a:fld id="{B1CAF232-DB1F-4E7B-961B-091AE5BB74B4}" type="datetimeFigureOut">
               <a:rPr lang="ko-KR" altLang="en-US" smtClean="0"/>
-              <a:t>2026-07-30</a:t>
+              <a:t>2026-07-31</a:t>
             </a:fld>
             <a:endParaRPr lang="ko-KR" altLang="en-US"/>
           </a:p>
@@ -614,7 +614,7 @@
           <a:p>
             <a:fld id="{B1CAF232-DB1F-4E7B-961B-091AE5BB74B4}" type="datetimeFigureOut">
               <a:rPr lang="ko-KR" altLang="en-US" smtClean="0"/>
-              <a:t>2026-07-30</a:t>
+              <a:t>2026-07-31</a:t>
             </a:fld>
             <a:endParaRPr lang="ko-KR" altLang="en-US"/>
           </a:p>
@@ -784,7 +784,7 @@
           <a:p>
             <a:fld id="{B1CAF232-DB1F-4E7B-961B-091AE5BB74B4}" type="datetimeFigureOut">
               <a:rPr lang="ko-KR" altLang="en-US" smtClean="0"/>
-              <a:t>2026-07-30</a:t>
+              <a:t>2026-07-31</a:t>
             </a:fld>
             <a:endParaRPr lang="ko-KR" altLang="en-US"/>
           </a:p>
@@ -1030,7 +1030,7 @@
           <a:p>
             <a:fld id="{B1CAF232-DB1F-4E7B-961B-091AE5BB74B4}" type="datetimeFigureOut">
               <a:rPr lang="ko-KR" altLang="en-US" smtClean="0"/>
-              <a:t>2026-07-30</a:t>
+              <a:t>2026-07-31</a:t>
             </a:fld>
             <a:endParaRPr lang="ko-KR" altLang="en-US"/>
           </a:p>
@@ -1262,7 +1262,7 @@
           <a:p>
             <a:fld id="{B1CAF232-DB1F-4E7B-961B-091AE5BB74B4}" type="datetimeFigureOut">
               <a:rPr lang="ko-KR" altLang="en-US" smtClean="0"/>
-              <a:t>2026-07-30</a:t>
+              <a:t>2026-07-31</a:t>
             </a:fld>
             <a:endParaRPr lang="ko-KR" altLang="en-US"/>
           </a:p>
@@ -1629,7 +1629,7 @@
           <a:p>
             <a:fld id="{B1CAF232-DB1F-4E7B-961B-091AE5BB74B4}" type="datetimeFigureOut">
               <a:rPr lang="ko-KR" altLang="en-US" smtClean="0"/>
-              <a:t>2026-07-30</a:t>
+              <a:t>2026-07-31</a:t>
             </a:fld>
             <a:endParaRPr lang="ko-KR" altLang="en-US"/>
           </a:p>
@@ -1747,7 +1747,7 @@
           <a:p>
             <a:fld id="{B1CAF232-DB1F-4E7B-961B-091AE5BB74B4}" type="datetimeFigureOut">
               <a:rPr lang="ko-KR" altLang="en-US" smtClean="0"/>
-              <a:t>2026-07-30</a:t>
+              <a:t>2026-07-31</a:t>
             </a:fld>
             <a:endParaRPr lang="ko-KR" altLang="en-US"/>
           </a:p>
@@ -1842,7 +1842,7 @@
           <a:p>
             <a:fld id="{B1CAF232-DB1F-4E7B-961B-091AE5BB74B4}" type="datetimeFigureOut">
               <a:rPr lang="ko-KR" altLang="en-US" smtClean="0"/>
-              <a:t>2026-07-30</a:t>
+              <a:t>2026-07-31</a:t>
             </a:fld>
             <a:endParaRPr lang="ko-KR" altLang="en-US"/>
           </a:p>
@@ -2119,7 +2119,7 @@
           <a:p>
             <a:fld id="{B1CAF232-DB1F-4E7B-961B-091AE5BB74B4}" type="datetimeFigureOut">
               <a:rPr lang="ko-KR" altLang="en-US" smtClean="0"/>
-              <a:t>2026-07-30</a:t>
+              <a:t>2026-07-31</a:t>
             </a:fld>
             <a:endParaRPr lang="ko-KR" altLang="en-US"/>
           </a:p>
@@ -2372,7 +2372,7 @@
           <a:p>
             <a:fld id="{B1CAF232-DB1F-4E7B-961B-091AE5BB74B4}" type="datetimeFigureOut">
               <a:rPr lang="ko-KR" altLang="en-US" smtClean="0"/>
-              <a:t>2026-07-30</a:t>
+              <a:t>2026-07-31</a:t>
             </a:fld>
             <a:endParaRPr lang="ko-KR" altLang="en-US"/>
           </a:p>
@@ -2585,7 +2585,7 @@
           <a:p>
             <a:fld id="{B1CAF232-DB1F-4E7B-961B-091AE5BB74B4}" type="datetimeFigureOut">
               <a:rPr lang="ko-KR" altLang="en-US" smtClean="0"/>
-              <a:t>2026-07-30</a:t>
+              <a:t>2026-07-31</a:t>
             </a:fld>
             <a:endParaRPr lang="ko-KR" altLang="en-US"/>
           </a:p>
